--- a/curso_es/pptx/S20.pptx
+++ b/curso_es/pptx/S20.pptx
@@ -3800,7 +3800,7 @@
                 </a:solidFill>
                 <a:latin typeface="Nunito Sans"/>
               </a:rPr>
-              <a:t>El padre de Dylan: «O dejas los videojuegos para siempre, o vas a suspender todo».</a:t>
+              <a:t>El padre de un chico: «O dejas los videojuegos para siempre, o vas a suspender todo».</a:t>
             </a:r>
           </a:p>
         </p:txBody>
@@ -4109,7 +4109,7 @@
                 </a:solidFill>
                 <a:latin typeface="Nunito Sans"/>
               </a:rPr>
-              <a:t>Leire tiene entrada para un concierto y para un partido. Los dos son el sábado a las seis, en sitios distintos de Bilbao.</a:t>
+              <a:t>Una chica tiene entrada para un concierto y para un partido. Los dos son el sábado a las seis, en sitios distintos de Bilbao.</a:t>
             </a:r>
           </a:p>
         </p:txBody>
@@ -4418,7 +4418,7 @@
                 </a:solidFill>
                 <a:latin typeface="Nunito Sans"/>
               </a:rPr>
-              <a:t>El VAR revisa una jugada: «O el balón ha cruzado entera la línea, o no la ha cruzado». Kevin: «¡Falso dilema! Solo da dos opciones».</a:t>
+              <a:t>El VAR revisa una jugada: «O el balón ha cruzado entera la línea, o no la ha cruzado». Un chico: «¡Falso dilema! Solo da dos opciones».</a:t>
             </a:r>
           </a:p>
         </p:txBody>
@@ -4466,7 +4466,7 @@
                 </a:solidFill>
                 <a:latin typeface="Nunito Sans"/>
               </a:rPr>
-              <a:t>Tiene la forma «o… o…». ¿Tiene razón Kevin?</a:t>
+              <a:t>Tiene la forma «o… o…». ¿Tiene razón ese chico?</a:t>
             </a:r>
           </a:p>
           <a:p>
@@ -6694,7 +6694,7 @@
                 </a:solidFill>
                 <a:latin typeface="Nunito Sans"/>
               </a:rPr>
-              <a:t>Mensaje de la cuadrilla: «O vienes a Aste Nagusia toda la noche, o es que ya no eres de los nuestros».</a:t>
+              <a:t>Mensaje que recibe una chica de su cuadrilla: «O vienes a Aste Nagusia toda la noche, o es que ya no eres de las nuestras».</a:t>
             </a:r>
           </a:p>
         </p:txBody>
@@ -7717,7 +7717,7 @@
                 </a:solidFill>
                 <a:latin typeface="Nunito Sans"/>
               </a:rPr>
-              <a:t>Mensaje de la cuadrilla: «O vienes a Aste Nagusia toda la noche, o es que ya no eres de los nuestros».</a:t>
+              <a:t>Mensaje que recibe una chica de su cuadrilla: «O vienes a Aste Nagusia toda la noche, o es que ya no eres de las nuestras».</a:t>
             </a:r>
           </a:p>
         </p:txBody>
@@ -7765,7 +7765,7 @@
                 </a:solidFill>
                 <a:latin typeface="Nunito Sans"/>
               </a:rPr>
-              <a:t>¿Qué dos opciones me dan? Ir toda la noche, o dejar de ser de la cuadrilla.</a:t>
+              <a:t>¿Qué dos opciones le dan a esa chica? Ir toda la noche, o dejar de ser de la cuadrilla.</a:t>
             </a:r>
           </a:p>
           <a:p>
@@ -7815,7 +7815,7 @@
                 </a:solidFill>
                 <a:latin typeface="Nunito Sans"/>
               </a:rPr>
-              <a:t>¿Para qué sirve el dilema? Para empujarme: la otra opción da miedo.</a:t>
+              <a:t>¿Para qué sirve el dilema? Para empujarla: la otra opción da miedo.</a:t>
             </a:r>
           </a:p>
           <a:p>
